--- a/docs/presentations/Dokaz_Sales_Deck.pptx
+++ b/docs/presentations/Dokaz_Sales_Deck.pptx
@@ -7396,7 +7396,7 @@
                 </a:solidFill>
                 <a:latin typeface="Calibri"/>
               </a:rPr>
-              <a:t>$99 to start. $1 first month, on your own dump.</a:t>
+              <a:t>$100 to start. $1 first month, on your own dump. Daily drills on every tier.</a:t>
             </a:r>
           </a:p>
         </p:txBody>
@@ -7558,7 +7558,7 @@
                 </a:solidFill>
                 <a:latin typeface="Calibri"/>
               </a:rPr>
-              <a:t>$99</a:t>
+              <a:t>$100</a:t>
             </a:r>
           </a:p>
         </p:txBody>
@@ -7676,7 +7676,7 @@
                 </a:solidFill>
                 <a:latin typeface="Calibri"/>
               </a:rPr>
-              <a:t>DRILL FREQUENCY</a:t>
+              <a:t>CAPACITY</a:t>
             </a:r>
           </a:p>
         </p:txBody>
@@ -7711,7 +7711,7 @@
                 </a:solidFill>
                 <a:latin typeface="Calibri"/>
               </a:rPr>
-              <a:t>Weekly</a:t>
+              <a:t>5 databases</a:t>
             </a:r>
           </a:p>
         </p:txBody>
@@ -7746,7 +7746,7 @@
                 </a:solidFill>
                 <a:latin typeface="Calibri"/>
               </a:rPr>
-              <a:t>· 5 databases</a:t>
+              <a:t>· Daily drills · signed PDF · 7-year retention</a:t>
             </a:r>
           </a:p>
         </p:txBody>
@@ -7781,7 +7781,7 @@
                 </a:solidFill>
                 <a:latin typeface="Calibri"/>
               </a:rPr>
-              <a:t>· 3 seats</a:t>
+              <a:t>· Unlimited seats · 25 backup check-ins</a:t>
             </a:r>
           </a:p>
         </p:txBody>
@@ -7816,7 +7816,7 @@
                 </a:solidFill>
                 <a:latin typeface="Calibri"/>
               </a:rPr>
-              <a:t>· Signed PDF · 7-year retention</a:t>
+              <a:t>· Auditor share links</a:t>
             </a:r>
           </a:p>
         </p:txBody>
@@ -7851,7 +7851,7 @@
                 </a:solidFill>
                 <a:latin typeface="Calibri"/>
               </a:rPr>
-              <a:t>· Auditor share links</a:t>
+              <a:t>· Slack + PagerDuty</a:t>
             </a:r>
           </a:p>
         </p:txBody>
@@ -7886,41 +7886,6 @@
                 </a:solidFill>
                 <a:latin typeface="Calibri"/>
               </a:rPr>
-              <a:t>· Slack + PagerDuty</a:t>
-            </a:r>
-          </a:p>
-        </p:txBody>
-      </p:sp>
-      <p:sp>
-        <p:nvSpPr>
-          <p:cNvPr id="20" name="TextBox 19"/>
-          <p:cNvSpPr txBox="1"/>
-          <p:nvPr/>
-        </p:nvSpPr>
-        <p:spPr>
-          <a:xfrm>
-            <a:off x="822960" y="5806440"/>
-            <a:ext cx="2194560" cy="274320"/>
-          </a:xfrm>
-          <a:prstGeom prst="rect">
-            <a:avLst/>
-          </a:prstGeom>
-          <a:noFill/>
-        </p:spPr>
-        <p:txBody>
-          <a:bodyPr wrap="square" lIns="0" rIns="0" tIns="0" bIns="0" anchor="t">
-            <a:spAutoFit/>
-          </a:bodyPr>
-          <a:lstStyle/>
-          <a:p>
-            <a:pPr algn="l"/>
-            <a:r>
-              <a:rPr sz="950" b="0">
-                <a:solidFill>
-                  <a:srgbClr val="D7DEE7"/>
-                </a:solidFill>
-                <a:latin typeface="Calibri"/>
-              </a:rPr>
               <a:t>· Email support</a:t>
             </a:r>
           </a:p>
@@ -7928,7 +7893,7 @@
       </p:sp>
       <p:sp>
         <p:nvSpPr>
-          <p:cNvPr id="21" name="Rounded Rectangle 20"/>
+          <p:cNvPr id="20" name="Rounded Rectangle 19"/>
           <p:cNvSpPr/>
           <p:nvPr/>
         </p:nvSpPr>
@@ -7976,7 +7941,7 @@
       </p:sp>
       <p:sp>
         <p:nvSpPr>
-          <p:cNvPr id="22" name="Rounded Rectangle 21"/>
+          <p:cNvPr id="21" name="Rounded Rectangle 20"/>
           <p:cNvSpPr/>
           <p:nvPr/>
         </p:nvSpPr>
@@ -8030,7 +7995,7 @@
       </p:sp>
       <p:sp>
         <p:nvSpPr>
-          <p:cNvPr id="23" name="TextBox 22"/>
+          <p:cNvPr id="22" name="TextBox 21"/>
           <p:cNvSpPr txBox="1"/>
           <p:nvPr/>
         </p:nvSpPr>
@@ -8065,7 +8030,7 @@
       </p:sp>
       <p:sp>
         <p:nvSpPr>
-          <p:cNvPr id="24" name="TextBox 23"/>
+          <p:cNvPr id="23" name="TextBox 22"/>
           <p:cNvSpPr txBox="1"/>
           <p:nvPr/>
         </p:nvSpPr>
@@ -8093,14 +8058,14 @@
                 </a:solidFill>
                 <a:latin typeface="Calibri"/>
               </a:rPr>
-              <a:t>$299</a:t>
-            </a:r>
-          </a:p>
-        </p:txBody>
-      </p:sp>
-      <p:sp>
-        <p:nvSpPr>
-          <p:cNvPr id="25" name="TextBox 24"/>
+              <a:t>$300</a:t>
+            </a:r>
+          </a:p>
+        </p:txBody>
+      </p:sp>
+      <p:sp>
+        <p:nvSpPr>
+          <p:cNvPr id="24" name="TextBox 23"/>
           <p:cNvSpPr txBox="1"/>
           <p:nvPr/>
         </p:nvSpPr>
@@ -8135,7 +8100,7 @@
       </p:sp>
       <p:sp>
         <p:nvSpPr>
-          <p:cNvPr id="26" name="Rounded Rectangle 25"/>
+          <p:cNvPr id="25" name="Rounded Rectangle 24"/>
           <p:cNvSpPr/>
           <p:nvPr/>
         </p:nvSpPr>
@@ -8183,7 +8148,7 @@
       </p:sp>
       <p:sp>
         <p:nvSpPr>
-          <p:cNvPr id="27" name="TextBox 26"/>
+          <p:cNvPr id="26" name="TextBox 25"/>
           <p:cNvSpPr txBox="1"/>
           <p:nvPr/>
         </p:nvSpPr>
@@ -8211,14 +8176,14 @@
                 </a:solidFill>
                 <a:latin typeface="Calibri"/>
               </a:rPr>
-              <a:t>DRILL FREQUENCY</a:t>
-            </a:r>
-          </a:p>
-        </p:txBody>
-      </p:sp>
-      <p:sp>
-        <p:nvSpPr>
-          <p:cNvPr id="28" name="TextBox 27"/>
+              <a:t>CAPACITY</a:t>
+            </a:r>
+          </a:p>
+        </p:txBody>
+      </p:sp>
+      <p:sp>
+        <p:nvSpPr>
+          <p:cNvPr id="27" name="TextBox 26"/>
           <p:cNvSpPr txBox="1"/>
           <p:nvPr/>
         </p:nvSpPr>
@@ -8246,14 +8211,14 @@
                 </a:solidFill>
                 <a:latin typeface="Calibri"/>
               </a:rPr>
-              <a:t>Weekly</a:t>
-            </a:r>
-          </a:p>
-        </p:txBody>
-      </p:sp>
-      <p:sp>
-        <p:nvSpPr>
-          <p:cNvPr id="29" name="TextBox 28"/>
+              <a:t>25 databases</a:t>
+            </a:r>
+          </a:p>
+        </p:txBody>
+      </p:sp>
+      <p:sp>
+        <p:nvSpPr>
+          <p:cNvPr id="28" name="TextBox 27"/>
           <p:cNvSpPr txBox="1"/>
           <p:nvPr/>
         </p:nvSpPr>
@@ -8281,14 +8246,14 @@
                 </a:solidFill>
                 <a:latin typeface="Calibri"/>
               </a:rPr>
-              <a:t>· 25 databases</a:t>
-            </a:r>
-          </a:p>
-        </p:txBody>
-      </p:sp>
-      <p:sp>
-        <p:nvSpPr>
-          <p:cNvPr id="30" name="TextBox 29"/>
+              <a:t>· Daily drills · everything in Starter</a:t>
+            </a:r>
+          </a:p>
+        </p:txBody>
+      </p:sp>
+      <p:sp>
+        <p:nvSpPr>
+          <p:cNvPr id="29" name="TextBox 28"/>
           <p:cNvSpPr txBox="1"/>
           <p:nvPr/>
         </p:nvSpPr>
@@ -8316,14 +8281,14 @@
                 </a:solidFill>
                 <a:latin typeface="Calibri"/>
               </a:rPr>
-              <a:t>· 10 seats</a:t>
-            </a:r>
-          </a:p>
-        </p:txBody>
-      </p:sp>
-      <p:sp>
-        <p:nvSpPr>
-          <p:cNvPr id="31" name="TextBox 30"/>
+              <a:t>· 50 backup check-ins</a:t>
+            </a:r>
+          </a:p>
+        </p:txBody>
+      </p:sp>
+      <p:sp>
+        <p:nvSpPr>
+          <p:cNvPr id="30" name="TextBox 29"/>
           <p:cNvSpPr txBox="1"/>
           <p:nvPr/>
         </p:nvSpPr>
@@ -8351,14 +8316,14 @@
                 </a:solidFill>
                 <a:latin typeface="Calibri"/>
               </a:rPr>
-              <a:t>· Everything in Starter</a:t>
-            </a:r>
-          </a:p>
-        </p:txBody>
-      </p:sp>
-      <p:sp>
-        <p:nvSpPr>
-          <p:cNvPr id="32" name="TextBox 31"/>
+              <a:t>· Unlimited API keys · signed webhooks</a:t>
+            </a:r>
+          </a:p>
+        </p:txBody>
+      </p:sp>
+      <p:sp>
+        <p:nvSpPr>
+          <p:cNvPr id="31" name="TextBox 30"/>
           <p:cNvSpPr txBox="1"/>
           <p:nvPr/>
         </p:nvSpPr>
@@ -8386,41 +8351,6 @@
                 </a:solidFill>
                 <a:latin typeface="Calibri"/>
               </a:rPr>
-              <a:t>· API access · signed webhooks</a:t>
-            </a:r>
-          </a:p>
-        </p:txBody>
-      </p:sp>
-      <p:sp>
-        <p:nvSpPr>
-          <p:cNvPr id="33" name="TextBox 32"/>
-          <p:cNvSpPr txBox="1"/>
-          <p:nvPr/>
-        </p:nvSpPr>
-        <p:spPr>
-          <a:xfrm>
-            <a:off x="3703320" y="5513832"/>
-            <a:ext cx="2194560" cy="274320"/>
-          </a:xfrm>
-          <a:prstGeom prst="rect">
-            <a:avLst/>
-          </a:prstGeom>
-          <a:noFill/>
-        </p:spPr>
-        <p:txBody>
-          <a:bodyPr wrap="square" lIns="0" rIns="0" tIns="0" bIns="0" anchor="t">
-            <a:spAutoFit/>
-          </a:bodyPr>
-          <a:lstStyle/>
-          <a:p>
-            <a:pPr algn="l"/>
-            <a:r>
-              <a:rPr sz="950" b="0">
-                <a:solidFill>
-                  <a:srgbClr val="D7DEE7"/>
-                </a:solidFill>
-                <a:latin typeface="Calibri"/>
-              </a:rPr>
               <a:t>· Priority support</a:t>
             </a:r>
           </a:p>
@@ -8428,7 +8358,7 @@
       </p:sp>
       <p:sp>
         <p:nvSpPr>
-          <p:cNvPr id="34" name="Rounded Rectangle 33"/>
+          <p:cNvPr id="32" name="Rounded Rectangle 31"/>
           <p:cNvSpPr/>
           <p:nvPr/>
         </p:nvSpPr>
@@ -8476,7 +8406,7 @@
       </p:sp>
       <p:sp>
         <p:nvSpPr>
-          <p:cNvPr id="35" name="TextBox 34"/>
+          <p:cNvPr id="33" name="TextBox 32"/>
           <p:cNvSpPr txBox="1"/>
           <p:nvPr/>
         </p:nvSpPr>
@@ -8504,14 +8434,14 @@
                 </a:solidFill>
                 <a:latin typeface="Calibri"/>
               </a:rPr>
-              <a:t>Scale</a:t>
-            </a:r>
-          </a:p>
-        </p:txBody>
-      </p:sp>
-      <p:sp>
-        <p:nvSpPr>
-          <p:cNvPr id="36" name="TextBox 35"/>
+              <a:t>Grounded</a:t>
+            </a:r>
+          </a:p>
+        </p:txBody>
+      </p:sp>
+      <p:sp>
+        <p:nvSpPr>
+          <p:cNvPr id="34" name="TextBox 33"/>
           <p:cNvSpPr txBox="1"/>
           <p:nvPr/>
         </p:nvSpPr>
@@ -8539,14 +8469,14 @@
                 </a:solidFill>
                 <a:latin typeface="Calibri"/>
               </a:rPr>
-              <a:t>$799</a:t>
-            </a:r>
-          </a:p>
-        </p:txBody>
-      </p:sp>
-      <p:sp>
-        <p:nvSpPr>
-          <p:cNvPr id="37" name="TextBox 36"/>
+              <a:t>$600</a:t>
+            </a:r>
+          </a:p>
+        </p:txBody>
+      </p:sp>
+      <p:sp>
+        <p:nvSpPr>
+          <p:cNvPr id="35" name="TextBox 34"/>
           <p:cNvSpPr txBox="1"/>
           <p:nvPr/>
         </p:nvSpPr>
@@ -8581,7 +8511,7 @@
       </p:sp>
       <p:sp>
         <p:nvSpPr>
-          <p:cNvPr id="38" name="Rounded Rectangle 37"/>
+          <p:cNvPr id="36" name="Rounded Rectangle 35"/>
           <p:cNvSpPr/>
           <p:nvPr/>
         </p:nvSpPr>
@@ -8629,7 +8559,7 @@
       </p:sp>
       <p:sp>
         <p:nvSpPr>
-          <p:cNvPr id="39" name="TextBox 38"/>
+          <p:cNvPr id="37" name="TextBox 36"/>
           <p:cNvSpPr txBox="1"/>
           <p:nvPr/>
         </p:nvSpPr>
@@ -8657,14 +8587,14 @@
                 </a:solidFill>
                 <a:latin typeface="Calibri"/>
               </a:rPr>
-              <a:t>DRILL FREQUENCY</a:t>
-            </a:r>
-          </a:p>
-        </p:txBody>
-      </p:sp>
-      <p:sp>
-        <p:nvSpPr>
-          <p:cNvPr id="40" name="TextBox 39"/>
+              <a:t>CAPACITY</a:t>
+            </a:r>
+          </a:p>
+        </p:txBody>
+      </p:sp>
+      <p:sp>
+        <p:nvSpPr>
+          <p:cNvPr id="38" name="TextBox 37"/>
           <p:cNvSpPr txBox="1"/>
           <p:nvPr/>
         </p:nvSpPr>
@@ -8692,14 +8622,14 @@
                 </a:solidFill>
                 <a:latin typeface="Calibri"/>
               </a:rPr>
-              <a:t>Daily</a:t>
-            </a:r>
-          </a:p>
-        </p:txBody>
-      </p:sp>
-      <p:sp>
-        <p:nvSpPr>
-          <p:cNvPr id="41" name="TextBox 40"/>
+              <a:t>100 databases</a:t>
+            </a:r>
+          </a:p>
+        </p:txBody>
+      </p:sp>
+      <p:sp>
+        <p:nvSpPr>
+          <p:cNvPr id="39" name="TextBox 38"/>
           <p:cNvSpPr txBox="1"/>
           <p:nvPr/>
         </p:nvSpPr>
@@ -8727,14 +8657,14 @@
                 </a:solidFill>
                 <a:latin typeface="Calibri"/>
               </a:rPr>
-              <a:t>· Unlimited databases</a:t>
-            </a:r>
-          </a:p>
-        </p:txBody>
-      </p:sp>
-      <p:sp>
-        <p:nvSpPr>
-          <p:cNvPr id="42" name="TextBox 41"/>
+              <a:t>· Daily drills · everything in Growth</a:t>
+            </a:r>
+          </a:p>
+        </p:txBody>
+      </p:sp>
+      <p:sp>
+        <p:nvSpPr>
+          <p:cNvPr id="40" name="TextBox 39"/>
           <p:cNvSpPr txBox="1"/>
           <p:nvPr/>
         </p:nvSpPr>
@@ -8762,14 +8692,14 @@
                 </a:solidFill>
                 <a:latin typeface="Calibri"/>
               </a:rPr>
-              <a:t>· Unlimited seats</a:t>
-            </a:r>
-          </a:p>
-        </p:txBody>
-      </p:sp>
-      <p:sp>
-        <p:nvSpPr>
-          <p:cNvPr id="43" name="TextBox 42"/>
+              <a:t>· Unlimited backup check-ins</a:t>
+            </a:r>
+          </a:p>
+        </p:txBody>
+      </p:sp>
+      <p:sp>
+        <p:nvSpPr>
+          <p:cNvPr id="41" name="TextBox 40"/>
           <p:cNvSpPr txBox="1"/>
           <p:nvPr/>
         </p:nvSpPr>
@@ -8797,14 +8727,14 @@
                 </a:solidFill>
                 <a:latin typeface="Calibri"/>
               </a:rPr>
-              <a:t>· Everything in Growth</a:t>
-            </a:r>
-          </a:p>
-        </p:txBody>
-      </p:sp>
-      <p:sp>
-        <p:nvSpPr>
-          <p:cNvPr id="44" name="TextBox 43"/>
+              <a:t>· Priority + dedicated channel</a:t>
+            </a:r>
+          </a:p>
+        </p:txBody>
+      </p:sp>
+      <p:sp>
+        <p:nvSpPr>
+          <p:cNvPr id="42" name="TextBox 41"/>
           <p:cNvSpPr txBox="1"/>
           <p:nvPr/>
         </p:nvSpPr>
@@ -8832,41 +8762,6 @@
                 </a:solidFill>
                 <a:latin typeface="Calibri"/>
               </a:rPr>
-              <a:t>· Priority + dedicated channel</a:t>
-            </a:r>
-          </a:p>
-        </p:txBody>
-      </p:sp>
-      <p:sp>
-        <p:nvSpPr>
-          <p:cNvPr id="45" name="TextBox 44"/>
-          <p:cNvSpPr txBox="1"/>
-          <p:nvPr/>
-        </p:nvSpPr>
-        <p:spPr>
-          <a:xfrm>
-            <a:off x="6583680" y="5513832"/>
-            <a:ext cx="2194560" cy="274320"/>
-          </a:xfrm>
-          <a:prstGeom prst="rect">
-            <a:avLst/>
-          </a:prstGeom>
-          <a:noFill/>
-        </p:spPr>
-        <p:txBody>
-          <a:bodyPr wrap="square" lIns="0" rIns="0" tIns="0" bIns="0" anchor="t">
-            <a:spAutoFit/>
-          </a:bodyPr>
-          <a:lstStyle/>
-          <a:p>
-            <a:pPr algn="l"/>
-            <a:r>
-              <a:rPr sz="950" b="0">
-                <a:solidFill>
-                  <a:srgbClr val="D7DEE7"/>
-                </a:solidFill>
-                <a:latin typeface="Calibri"/>
-              </a:rPr>
               <a:t>· SSO (roadmap)</a:t>
             </a:r>
           </a:p>
@@ -8874,7 +8769,7 @@
       </p:sp>
       <p:sp>
         <p:nvSpPr>
-          <p:cNvPr id="46" name="Rounded Rectangle 45"/>
+          <p:cNvPr id="43" name="Rounded Rectangle 42"/>
           <p:cNvSpPr/>
           <p:nvPr/>
         </p:nvSpPr>
@@ -8922,7 +8817,7 @@
       </p:sp>
       <p:sp>
         <p:nvSpPr>
-          <p:cNvPr id="47" name="TextBox 46"/>
+          <p:cNvPr id="44" name="TextBox 43"/>
           <p:cNvSpPr txBox="1"/>
           <p:nvPr/>
         </p:nvSpPr>
@@ -8957,7 +8852,7 @@
       </p:sp>
       <p:sp>
         <p:nvSpPr>
-          <p:cNvPr id="48" name="TextBox 47"/>
+          <p:cNvPr id="45" name="TextBox 44"/>
           <p:cNvSpPr txBox="1"/>
           <p:nvPr/>
         </p:nvSpPr>
@@ -8985,14 +8880,14 @@
                 </a:solidFill>
                 <a:latin typeface="Calibri"/>
               </a:rPr>
-              <a:t>From $1.5k</a:t>
-            </a:r>
-          </a:p>
-        </p:txBody>
-      </p:sp>
-      <p:sp>
-        <p:nvSpPr>
-          <p:cNvPr id="49" name="TextBox 48"/>
+              <a:t>Custom</a:t>
+            </a:r>
+          </a:p>
+        </p:txBody>
+      </p:sp>
+      <p:sp>
+        <p:nvSpPr>
+          <p:cNvPr id="46" name="TextBox 45"/>
           <p:cNvSpPr txBox="1"/>
           <p:nvPr/>
         </p:nvSpPr>
@@ -9020,14 +8915,14 @@
                 </a:solidFill>
                 <a:latin typeface="Calibri"/>
               </a:rPr>
-              <a:t>/mo</a:t>
-            </a:r>
-          </a:p>
-        </p:txBody>
-      </p:sp>
-      <p:sp>
-        <p:nvSpPr>
-          <p:cNvPr id="50" name="Rounded Rectangle 49"/>
+              <a:t/>
+            </a:r>
+          </a:p>
+        </p:txBody>
+      </p:sp>
+      <p:sp>
+        <p:nvSpPr>
+          <p:cNvPr id="47" name="Rounded Rectangle 46"/>
           <p:cNvSpPr/>
           <p:nvPr/>
         </p:nvSpPr>
@@ -9075,7 +8970,7 @@
       </p:sp>
       <p:sp>
         <p:nvSpPr>
-          <p:cNvPr id="51" name="TextBox 50"/>
+          <p:cNvPr id="48" name="TextBox 47"/>
           <p:cNvSpPr txBox="1"/>
           <p:nvPr/>
         </p:nvSpPr>
@@ -9103,14 +8998,14 @@
                 </a:solidFill>
                 <a:latin typeface="Calibri"/>
               </a:rPr>
-              <a:t>DRILL FREQUENCY</a:t>
-            </a:r>
-          </a:p>
-        </p:txBody>
-      </p:sp>
-      <p:sp>
-        <p:nvSpPr>
-          <p:cNvPr id="52" name="TextBox 51"/>
+              <a:t>REGULATED / HANDS-ON</a:t>
+            </a:r>
+          </a:p>
+        </p:txBody>
+      </p:sp>
+      <p:sp>
+        <p:nvSpPr>
+          <p:cNvPr id="49" name="TextBox 48"/>
           <p:cNvSpPr txBox="1"/>
           <p:nvPr/>
         </p:nvSpPr>
@@ -9138,14 +9033,14 @@
                 </a:solidFill>
                 <a:latin typeface="Calibri"/>
               </a:rPr>
-              <a:t>Custom</a:t>
-            </a:r>
-          </a:p>
-        </p:txBody>
-      </p:sp>
-      <p:sp>
-        <p:nvSpPr>
-          <p:cNvPr id="53" name="TextBox 52"/>
+              <a:t>Sales-led</a:t>
+            </a:r>
+          </a:p>
+        </p:txBody>
+      </p:sp>
+      <p:sp>
+        <p:nvSpPr>
+          <p:cNvPr id="50" name="TextBox 49"/>
           <p:cNvSpPr txBox="1"/>
           <p:nvPr/>
         </p:nvSpPr>
@@ -9173,14 +9068,14 @@
                 </a:solidFill>
                 <a:latin typeface="Calibri"/>
               </a:rPr>
-              <a:t>· Hourly + custom cadence</a:t>
-            </a:r>
-          </a:p>
-        </p:txBody>
-      </p:sp>
-      <p:sp>
-        <p:nvSpPr>
-          <p:cNvPr id="54" name="TextBox 53"/>
+              <a:t>· BYO runner in your VPC · SSO/SAML</a:t>
+            </a:r>
+          </a:p>
+        </p:txBody>
+      </p:sp>
+      <p:sp>
+        <p:nvSpPr>
+          <p:cNvPr id="51" name="TextBox 50"/>
           <p:cNvSpPr txBox="1"/>
           <p:nvPr/>
         </p:nvSpPr>
@@ -9208,14 +9103,14 @@
                 </a:solidFill>
                 <a:latin typeface="Calibri"/>
               </a:rPr>
-              <a:t>· Auditor read-only accounts</a:t>
-            </a:r>
-          </a:p>
-        </p:txBody>
-      </p:sp>
-      <p:sp>
-        <p:nvSpPr>
-          <p:cNvPr id="55" name="TextBox 54"/>
+              <a:t>· BAA / DPA · hourly cadence</a:t>
+            </a:r>
+          </a:p>
+        </p:txBody>
+      </p:sp>
+      <p:sp>
+        <p:nvSpPr>
+          <p:cNvPr id="52" name="TextBox 51"/>
           <p:cNvSpPr txBox="1"/>
           <p:nvPr/>
         </p:nvSpPr>
@@ -9243,14 +9138,14 @@
                 </a:solidFill>
                 <a:latin typeface="Calibri"/>
               </a:rPr>
-              <a:t>· BYO runner in your VPC</a:t>
-            </a:r>
-          </a:p>
-        </p:txBody>
-      </p:sp>
-      <p:sp>
-        <p:nvSpPr>
-          <p:cNvPr id="56" name="TextBox 55"/>
+              <a:t>· Auditor read-only accounts</a:t>
+            </a:r>
+          </a:p>
+        </p:txBody>
+      </p:sp>
+      <p:sp>
+        <p:nvSpPr>
+          <p:cNvPr id="53" name="TextBox 52"/>
           <p:cNvSpPr txBox="1"/>
           <p:nvPr/>
         </p:nvSpPr>
@@ -9278,49 +9173,14 @@
                 </a:solidFill>
                 <a:latin typeface="Calibri"/>
               </a:rPr>
-              <a:t>· Longer retention · custom SLA</a:t>
-            </a:r>
-          </a:p>
-        </p:txBody>
-      </p:sp>
-      <p:sp>
-        <p:nvSpPr>
-          <p:cNvPr id="57" name="TextBox 56"/>
-          <p:cNvSpPr txBox="1"/>
-          <p:nvPr/>
-        </p:nvSpPr>
-        <p:spPr>
-          <a:xfrm>
-            <a:off x="9464040" y="5513832"/>
-            <a:ext cx="2194560" cy="274320"/>
-          </a:xfrm>
-          <a:prstGeom prst="rect">
-            <a:avLst/>
-          </a:prstGeom>
-          <a:noFill/>
-        </p:spPr>
-        <p:txBody>
-          <a:bodyPr wrap="square" lIns="0" rIns="0" tIns="0" bIns="0" anchor="t">
-            <a:spAutoFit/>
-          </a:bodyPr>
-          <a:lstStyle/>
-          <a:p>
-            <a:pPr algn="l"/>
-            <a:r>
-              <a:rPr sz="950" b="0">
-                <a:solidFill>
-                  <a:srgbClr val="D7DEE7"/>
-                </a:solidFill>
-                <a:latin typeface="Calibri"/>
-              </a:rPr>
-              <a:t>· Named account manager</a:t>
-            </a:r>
-          </a:p>
-        </p:txBody>
-      </p:sp>
-      <p:sp>
-        <p:nvSpPr>
-          <p:cNvPr id="58" name="TextBox 57"/>
+              <a:t>· Custom SLA · named account manager</a:t>
+            </a:r>
+          </a:p>
+        </p:txBody>
+      </p:sp>
+      <p:sp>
+        <p:nvSpPr>
+          <p:cNvPr id="54" name="TextBox 53"/>
           <p:cNvSpPr txBox="1"/>
           <p:nvPr/>
         </p:nvSpPr>
@@ -9348,7 +9208,7 @@
                 </a:solidFill>
                 <a:latin typeface="Calibri"/>
               </a:rPr>
-              <a:t>$1 first month. One real database at weekly cadence during the trial. Cancel any time from the billing portal.</a:t>
+              <a:t>$1 first month. One real database at weekly cadence during the trial. Every paid tier includes daily drills, unlimited seats, 7-year retention.</a:t>
             </a:r>
           </a:p>
         </p:txBody>

--- a/docs/presentations/Dokaz_Sales_Deck.pptx
+++ b/docs/presentations/Dokaz_Sales_Deck.pptx
@@ -7396,7 +7396,7 @@
                 </a:solidFill>
                 <a:latin typeface="Calibri"/>
               </a:rPr>
-              <a:t>$100 to start. $1 first month, on your own dump. Daily drills on every tier.</a:t>
+              <a:t>$100 starter. Free to try, no card required. Daily drills on every tier.</a:t>
             </a:r>
           </a:p>
         </p:txBody>
@@ -9208,7 +9208,7 @@
                 </a:solidFill>
                 <a:latin typeface="Calibri"/>
               </a:rPr>
-              <a:t>$1 first month. One real database at weekly cadence during the trial. Every paid tier includes daily drills, unlimited seats, 7-year retention.</a:t>
+              <a:t>Free trial, no card required — one real database at weekly cadence. Every paid tier includes daily drills, unlimited seats, 7-year retention.</a:t>
             </a:r>
           </a:p>
         </p:txBody>
@@ -10082,7 +10082,7 @@
                 </a:solidFill>
                 <a:latin typeface="Calibri"/>
               </a:rPr>
-              <a:t>Sign up at dokaz.net. $1 first month. Run a drill against our sample dataset in 30 seconds — you'll see the exact signed PDF your auditor will see. Then connect your own pg_dump and prove it on your real backup, still inside the trial.</a:t>
+              <a:t>Sign up at dokaz.net. Free trial, no card required. Run a drill against our sample dataset in 30 seconds — you'll see the exact signed PDF your auditor will see. Then connect your own pg_dump and prove it on your real backup, still inside the trial.</a:t>
             </a:r>
           </a:p>
         </p:txBody>
